--- a/docs/seminar/seminar_20260806_DEM_MPM_SDCP_section.pptx
+++ b/docs/seminar/seminar_20260806_DEM_MPM_SDCP_section.pptx
@@ -8,6 +8,7 @@
     <p:notesMasterId xmlns:r="http://schemas.openxmlformats.org/officeDocument/2006/relationships" r:id="Ra196300f682d4c73"/>
   </p:notesMasterIdLst>
   <p:sldIdLst>
+    <p:sldId xmlns:ns0="http://schemas.openxmlformats.org/officeDocument/2006/relationships" id="270" ns0:id="rId21"/>
     <p:sldId xmlns:r="http://schemas.openxmlformats.org/officeDocument/2006/relationships" id="256" r:id="R40a511e192cd440b"/>
     <p:sldId xmlns:r="http://schemas.openxmlformats.org/officeDocument/2006/relationships" id="257" r:id="R07045030d68a4329"/>
     <p:sldId xmlns:r="http://schemas.openxmlformats.org/officeDocument/2006/relationships" id="258" r:id="Re0ffb31ada95494c"/>
@@ -8127,6 +8128,122 @@
 </p:sld>
 </file>
 
+<file path=ppt/slides/slide15.xml><?xml version="1.0" encoding="utf-8"?>
+<p:sld xmlns:a="http://schemas.openxmlformats.org/drawingml/2006/main" xmlns:p="http://schemas.openxmlformats.org/presentationml/2006/main" xmlns:r="http://schemas.openxmlformats.org/officeDocument/2006/relationships">
+  <p:cSld>
+    <p:spTree>
+      <p:nvGrpSpPr>
+        <p:cNvPr id="1" name=""/>
+        <p:cNvGrpSpPr/>
+        <p:nvPr/>
+      </p:nvGrpSpPr>
+      <p:grpSpPr/>
+      <p:sp>
+        <p:nvSpPr>
+          <p:cNvPr id="2" name="TextBox 1"/>
+          <p:cNvSpPr txBox="1"/>
+          <p:nvPr/>
+        </p:nvSpPr>
+        <p:spPr>
+          <a:xfrm>
+            <a:off x="640080" y="1508760"/>
+            <a:ext cx="7863840" cy="3840480"/>
+          </a:xfrm>
+          <a:prstGeom prst="rect">
+            <a:avLst/>
+          </a:prstGeom>
+          <a:noFill/>
+        </p:spPr>
+        <p:txBody>
+          <a:bodyPr wrap="square">
+            <a:spAutoFit/>
+          </a:bodyPr>
+          <a:lstStyle/>
+          <a:p>
+            <a:pPr>
+              <a:spcAft>
+                <a:spcPts val="1000"/>
+              </a:spcAft>
+            </a:pPr>
+            <a:r>
+              <a:rPr sz="3000" b="1">
+                <a:solidFill>
+                  <a:srgbClr val="C00000"/>
+                </a:solidFill>
+              </a:rPr>
+              <a:t>⛔ HISTORICAL — 인용 금지</a:t>
+            </a:r>
+          </a:p>
+          <a:p>
+            <a:pPr>
+              <a:spcAft>
+                <a:spcPts val="1000"/>
+              </a:spcAft>
+            </a:pPr>
+            <a:r>
+              <a:rPr sz="1700" b="0">
+                <a:solidFill>
+                  <a:srgbClr val="202020"/>
+                </a:solidFill>
+              </a:rPr>
+              <a:t>2026-08-06 발표본.  이 덱의 SDCP 전자·이온 이득 수치는 이후 **철회**됐다.</a:t>
+            </a:r>
+          </a:p>
+          <a:p>
+            <a:pPr>
+              <a:spcAft>
+                <a:spcPts val="1000"/>
+              </a:spcAft>
+            </a:pPr>
+            <a:r>
+              <a:rPr sz="1700" b="1">
+                <a:solidFill>
+                  <a:srgbClr val="202020"/>
+                </a:solidFill>
+              </a:rPr>
+              <a:t>정본 = docs/reviews/claims.json  (CL-24 · CL-33 · CL-41)</a:t>
+            </a:r>
+          </a:p>
+          <a:p>
+            <a:pPr>
+              <a:spcAft>
+                <a:spcPts val="1000"/>
+              </a:spcAft>
+            </a:pPr>
+            <a:r>
+              <a:rPr sz="1500" b="0">
+                <a:solidFill>
+                  <a:srgbClr val="404040"/>
+                </a:solidFill>
+              </a:rPr>
+              <a:t>격자(vox)를 조이면 전자 헤드라인이 계속 내려가고 이온 이득은 부호가 뒤집힌다.</a:t>
+            </a:r>
+          </a:p>
+          <a:p>
+            <a:pPr>
+              <a:spcAft>
+                <a:spcPts val="1000"/>
+              </a:spcAft>
+            </a:pPr>
+            <a:r>
+              <a:rPr sz="1500" b="0">
+                <a:solidFill>
+                  <a:srgbClr val="404040"/>
+                </a:solidFill>
+              </a:rPr>
+              <a:t>이 파일은 발표 이력 보존용이며, 어떤 수치도 현행 결론으로 쓰지 말 것.</a:t>
+            </a:r>
+          </a:p>
+        </p:txBody>
+      </p:sp>
+    </p:spTree>
+  </p:cSld>
+  <p:clrMapOvr>
+    <a:masterClrMapping/>
+  </p:clrMapOvr>
+</p:sld>
+</file>
+
 <file path=ppt/slides/slide2.xml><?xml version="1.0" encoding="utf-8"?>
 <p:sld xmlns:p="http://schemas.openxmlformats.org/presentationml/2006/main">
   <p:cSld>
